--- a/Covid  clinical taril.pptx
+++ b/Covid  clinical taril.pptx
@@ -113,7 +113,49 @@
       </a:defRPr>
     </a:lvl9pPr>
   </p:defaultTextStyle>
+  <p:extLst>
+    <p:ext uri="{EFAFB233-063F-42B5-8137-9DF3F51BA10A}">
+      <p15:sldGuideLst xmlns:p15="http://schemas.microsoft.com/office/powerpoint/2012/main"/>
+    </p:ext>
+  </p:extLst>
 </p:presentation>
+</file>
+
+<file path=ppt/revisionInfo.xml><?xml version="1.0" encoding="utf-8"?>
+<p1510:revInfo xmlns:a="http://schemas.openxmlformats.org/drawingml/2006/main" xmlns:r="http://schemas.openxmlformats.org/officeDocument/2006/relationships" xmlns:p1510="http://schemas.microsoft.com/office/powerpoint/2015/10/main">
+  <p1510:revLst>
+    <p1510:client id="{2E98DBD7-2B0B-4D77-90FA-4DDE788DB569}" v="1" dt="2026-02-08T10:13:50.977"/>
+  </p1510:revLst>
+</p1510:revInfo>
+</file>
+
+<file path=ppt/changesInfos/changesInfo1.xml><?xml version="1.0" encoding="utf-8"?>
+<pc:chgInfo xmlns:a="http://schemas.openxmlformats.org/drawingml/2006/main" xmlns:r="http://schemas.openxmlformats.org/officeDocument/2006/relationships" xmlns:ac="http://schemas.microsoft.com/office/drawing/2013/main/command" xmlns:pc="http://schemas.microsoft.com/office/powerpoint/2013/main/command">
+  <pc:docChgLst>
+    <pc:chgData name="Gayatri Kulkarni" userId="8bc8f7e35bece5ad" providerId="LiveId" clId="{6F5AA96B-57FA-48B6-8AB8-E8FA0E652726}"/>
+    <pc:docChg chg="custSel modSld">
+      <pc:chgData name="Gayatri Kulkarni" userId="8bc8f7e35bece5ad" providerId="LiveId" clId="{6F5AA96B-57FA-48B6-8AB8-E8FA0E652726}" dt="2026-02-08T10:13:50.977" v="53"/>
+      <pc:docMkLst>
+        <pc:docMk/>
+      </pc:docMkLst>
+      <pc:sldChg chg="modSp mod">
+        <pc:chgData name="Gayatri Kulkarni" userId="8bc8f7e35bece5ad" providerId="LiveId" clId="{6F5AA96B-57FA-48B6-8AB8-E8FA0E652726}" dt="2026-02-08T10:13:50.977" v="53"/>
+        <pc:sldMkLst>
+          <pc:docMk/>
+          <pc:sldMk cId="169380435" sldId="264"/>
+        </pc:sldMkLst>
+        <pc:spChg chg="mod">
+          <ac:chgData name="Gayatri Kulkarni" userId="8bc8f7e35bece5ad" providerId="LiveId" clId="{6F5AA96B-57FA-48B6-8AB8-E8FA0E652726}" dt="2026-02-08T10:13:50.977" v="53"/>
+          <ac:spMkLst>
+            <pc:docMk/>
+            <pc:sldMk cId="169380435" sldId="264"/>
+            <ac:spMk id="3" creationId="{BD597C6F-D872-A5AC-07EF-68F0FBA0F961}"/>
+          </ac:spMkLst>
+        </pc:spChg>
+      </pc:sldChg>
+    </pc:docChg>
+  </pc:docChgLst>
+</pc:chgInfo>
 </file>
 
 <file path=ppt/slideLayouts/slideLayout1.xml><?xml version="1.0" encoding="utf-8"?>
@@ -265,7 +307,7 @@
           <a:p>
             <a:fld id="{E22AD25B-50A0-439E-88BE-7DB3A8FF7F14}" type="datetimeFigureOut">
               <a:rPr lang="en-IN" smtClean="0"/>
-              <a:t>06-02-2026</a:t>
+              <a:t>08-02-2026</a:t>
             </a:fld>
             <a:endParaRPr lang="en-IN"/>
           </a:p>
@@ -465,7 +507,7 @@
           <a:p>
             <a:fld id="{E22AD25B-50A0-439E-88BE-7DB3A8FF7F14}" type="datetimeFigureOut">
               <a:rPr lang="en-IN" smtClean="0"/>
-              <a:t>06-02-2026</a:t>
+              <a:t>08-02-2026</a:t>
             </a:fld>
             <a:endParaRPr lang="en-IN"/>
           </a:p>
@@ -675,7 +717,7 @@
           <a:p>
             <a:fld id="{E22AD25B-50A0-439E-88BE-7DB3A8FF7F14}" type="datetimeFigureOut">
               <a:rPr lang="en-IN" smtClean="0"/>
-              <a:t>06-02-2026</a:t>
+              <a:t>08-02-2026</a:t>
             </a:fld>
             <a:endParaRPr lang="en-IN"/>
           </a:p>
@@ -875,7 +917,7 @@
           <a:p>
             <a:fld id="{E22AD25B-50A0-439E-88BE-7DB3A8FF7F14}" type="datetimeFigureOut">
               <a:rPr lang="en-IN" smtClean="0"/>
-              <a:t>06-02-2026</a:t>
+              <a:t>08-02-2026</a:t>
             </a:fld>
             <a:endParaRPr lang="en-IN"/>
           </a:p>
@@ -1151,7 +1193,7 @@
           <a:p>
             <a:fld id="{E22AD25B-50A0-439E-88BE-7DB3A8FF7F14}" type="datetimeFigureOut">
               <a:rPr lang="en-IN" smtClean="0"/>
-              <a:t>06-02-2026</a:t>
+              <a:t>08-02-2026</a:t>
             </a:fld>
             <a:endParaRPr lang="en-IN"/>
           </a:p>
@@ -1419,7 +1461,7 @@
           <a:p>
             <a:fld id="{E22AD25B-50A0-439E-88BE-7DB3A8FF7F14}" type="datetimeFigureOut">
               <a:rPr lang="en-IN" smtClean="0"/>
-              <a:t>06-02-2026</a:t>
+              <a:t>08-02-2026</a:t>
             </a:fld>
             <a:endParaRPr lang="en-IN"/>
           </a:p>
@@ -1834,7 +1876,7 @@
           <a:p>
             <a:fld id="{E22AD25B-50A0-439E-88BE-7DB3A8FF7F14}" type="datetimeFigureOut">
               <a:rPr lang="en-IN" smtClean="0"/>
-              <a:t>06-02-2026</a:t>
+              <a:t>08-02-2026</a:t>
             </a:fld>
             <a:endParaRPr lang="en-IN"/>
           </a:p>
@@ -1976,7 +2018,7 @@
           <a:p>
             <a:fld id="{E22AD25B-50A0-439E-88BE-7DB3A8FF7F14}" type="datetimeFigureOut">
               <a:rPr lang="en-IN" smtClean="0"/>
-              <a:t>06-02-2026</a:t>
+              <a:t>08-02-2026</a:t>
             </a:fld>
             <a:endParaRPr lang="en-IN"/>
           </a:p>
@@ -2089,7 +2131,7 @@
           <a:p>
             <a:fld id="{E22AD25B-50A0-439E-88BE-7DB3A8FF7F14}" type="datetimeFigureOut">
               <a:rPr lang="en-IN" smtClean="0"/>
-              <a:t>06-02-2026</a:t>
+              <a:t>08-02-2026</a:t>
             </a:fld>
             <a:endParaRPr lang="en-IN"/>
           </a:p>
@@ -2402,7 +2444,7 @@
           <a:p>
             <a:fld id="{E22AD25B-50A0-439E-88BE-7DB3A8FF7F14}" type="datetimeFigureOut">
               <a:rPr lang="en-IN" smtClean="0"/>
-              <a:t>06-02-2026</a:t>
+              <a:t>08-02-2026</a:t>
             </a:fld>
             <a:endParaRPr lang="en-IN"/>
           </a:p>
@@ -2691,7 +2733,7 @@
           <a:p>
             <a:fld id="{E22AD25B-50A0-439E-88BE-7DB3A8FF7F14}" type="datetimeFigureOut">
               <a:rPr lang="en-IN" smtClean="0"/>
-              <a:t>06-02-2026</a:t>
+              <a:t>08-02-2026</a:t>
             </a:fld>
             <a:endParaRPr lang="en-IN"/>
           </a:p>
@@ -2934,7 +2976,7 @@
           <a:p>
             <a:fld id="{E22AD25B-50A0-439E-88BE-7DB3A8FF7F14}" type="datetimeFigureOut">
               <a:rPr lang="en-IN" smtClean="0"/>
-              <a:t>06-02-2026</a:t>
+              <a:t>08-02-2026</a:t>
             </a:fld>
             <a:endParaRPr lang="en-IN"/>
           </a:p>
@@ -4853,7 +4895,7 @@
         <p:spPr/>
         <p:txBody>
           <a:bodyPr>
-            <a:normAutofit fontScale="92500" lnSpcReduction="20000"/>
+            <a:normAutofit fontScale="85000" lnSpcReduction="20000"/>
           </a:bodyPr>
           <a:lstStyle/>
           <a:p>
@@ -4922,6 +4964,25 @@
               <a:rPr lang="en-IN" dirty="0"/>
               <a:t>Visualization-based insight generation</a:t>
             </a:r>
+          </a:p>
+          <a:p>
+            <a:r>
+              <a:rPr lang="en-IN" dirty="0"/>
+              <a:t>Ref this link for code part of project :</a:t>
+            </a:r>
+            <a:r>
+              <a:rPr lang="en-IN" dirty="0">
+                <a:hlinkClick r:id="rId2"/>
+              </a:rPr>
+              <a:t>COVID CLINICAL TRIAL - </a:t>
+            </a:r>
+            <a:r>
+              <a:rPr lang="en-IN">
+                <a:hlinkClick r:id="rId2"/>
+              </a:rPr>
+              <a:t>Colab</a:t>
+            </a:r>
+            <a:endParaRPr lang="en-IN" dirty="0"/>
           </a:p>
           <a:p>
             <a:endParaRPr lang="en-IN" dirty="0"/>
